--- a/submission/OpsMind_AI_Deck_EN.pptx
+++ b/submission/OpsMind_AI_Deck_EN.pptx
@@ -7053,7 +7053,7 @@
                 </a:solidFill>
                 <a:latin typeface="Arial"/>
               </a:rPr>
-              <a:t>Team: OpsMind AI   ·   Team lead: Sisawaktu 11</a:t>
+              <a:t>Team: ABB Catalyst   ·   Team lead: Alwi Hamzah</a:t>
             </a:r>
           </a:p>
           <a:p>

--- a/submission/OpsMind_AI_Deck_EN.pptx
+++ b/submission/OpsMind_AI_Deck_EN.pptx
@@ -8667,7 +8667,7 @@
                 </a:solidFill>
                 <a:latin typeface="Arial"/>
               </a:rPr>
-              <a:t>• GitHub public repository: see the Hack2skill submission form.</a:t>
+              <a:t>• GitHub public repository: https://github.com/Elwyun/opsmind</a:t>
             </a:r>
           </a:p>
           <a:p>
@@ -8686,7 +8686,7 @@
                 </a:solidFill>
                 <a:latin typeface="Arial"/>
               </a:rPr>
-              <a:t>• Demo video (&lt;3 min): see the submission form.</a:t>
+              <a:t>• Demo video (&lt;3 min): https://drive.google.com/file/d/1MbWaVnI91_w6GK38qvh7ldsoKX-j5wls/view</a:t>
             </a:r>
           </a:p>
           <a:p>
@@ -8705,7 +8705,7 @@
                 </a:solidFill>
                 <a:latin typeface="Arial"/>
               </a:rPr>
-              <a:t>• Live prototype: see the submission form.</a:t>
+              <a:t>• Live prototype: https://opsmind-483387477810.asia-southeast1.run.app</a:t>
             </a:r>
           </a:p>
           <a:p>
